--- a/보험상담 AI Agent x 블록체인 인슈어테크.pptx
+++ b/보험상담 AI Agent x 블록체인 인슈어테크.pptx
@@ -11,6 +11,7 @@
     <p:sldId id="259" r:id="rId5"/>
     <p:sldId id="260" r:id="rId6"/>
     <p:sldId id="261" r:id="rId7"/>
+    <p:sldId id="262" r:id="rId8"/>
   </p:sldIdLst>
   <p:sldSz cx="12192000" cy="6858000"/>
   <p:notesSz cx="6858000" cy="9144000"/>
@@ -4341,6 +4342,1784 @@
 </p:sld>
 </file>
 
+<file path=ppt/slides/slide7.xml><?xml version="1.0" encoding="utf-8"?>
+<p:sld xmlns:a="http://schemas.openxmlformats.org/drawingml/2006/main" xmlns:r="http://schemas.openxmlformats.org/officeDocument/2006/relationships" xmlns:p="http://schemas.openxmlformats.org/presentationml/2006/main">
+  <p:cSld>
+    <p:spTree>
+      <p:nvGrpSpPr>
+        <p:cNvPr id="1" name=""/>
+        <p:cNvGrpSpPr/>
+        <p:nvPr/>
+      </p:nvGrpSpPr>
+      <p:grpSpPr>
+        <a:xfrm>
+          <a:off x="0" y="0"/>
+          <a:ext cx="0" cy="0"/>
+          <a:chOff x="0" y="0"/>
+          <a:chExt cx="0" cy="0"/>
+        </a:xfrm>
+      </p:grpSpPr>
+      <p:sp>
+        <p:nvSpPr>
+          <p:cNvPr id="3" name="직사각형 2"/>
+          <p:cNvSpPr/>
+          <p:nvPr/>
+        </p:nvSpPr>
+        <p:spPr>
+          <a:xfrm>
+            <a:off x="372862" y="612845"/>
+            <a:ext cx="11407806" cy="4247317"/>
+          </a:xfrm>
+          <a:prstGeom prst="rect">
+            <a:avLst/>
+          </a:prstGeom>
+        </p:spPr>
+        <p:txBody>
+          <a:bodyPr wrap="square">
+            <a:spAutoFit/>
+          </a:bodyPr>
+          <a:lstStyle/>
+          <a:p>
+            <a:r>
+              <a:rPr lang="ko-KR" altLang="en-US" sz="1000" dirty="0"/>
+              <a:t>공통 사전 준비- </a:t>
+            </a:r>
+            <a:r>
+              <a:rPr lang="ko-KR" altLang="en-US" sz="1000" dirty="0" err="1"/>
+              <a:t>블록체인+프론트엔드</a:t>
+            </a:r>
+            <a:r>
+              <a:rPr lang="ko-KR" altLang="en-US" sz="1000" dirty="0"/>
+              <a:t>: 루트 start.bat 실행 (</a:t>
+            </a:r>
+            <a:r>
+              <a:rPr lang="ko-KR" altLang="en-US" sz="1000" dirty="0" err="1"/>
+              <a:t>Hardhat</a:t>
+            </a:r>
+            <a:r>
+              <a:rPr lang="ko-KR" altLang="en-US" sz="1000" dirty="0"/>
+              <a:t> 노드 → 배포 → </a:t>
+            </a:r>
+            <a:r>
+              <a:rPr lang="ko-KR" altLang="en-US" sz="1000" dirty="0" err="1"/>
+              <a:t>프론트엔드</a:t>
+            </a:r>
+            <a:r>
+              <a:rPr lang="ko-KR" altLang="en-US" sz="1000" dirty="0"/>
+              <a:t> → 백그라운드 서비스 9종 자동 기동, </a:t>
+            </a:r>
+            <a:r>
+              <a:rPr lang="ko-KR" altLang="en-US" sz="1000" dirty="0" err="1"/>
+              <a:t>Chrome</a:t>
+            </a:r>
+            <a:r>
+              <a:rPr lang="ko-KR" altLang="en-US" sz="1000" dirty="0"/>
+              <a:t>=관리자 </a:t>
+            </a:r>
+            <a:r>
+              <a:rPr lang="ko-KR" altLang="en-US" sz="1000" dirty="0" err="1"/>
+              <a:t>Account</a:t>
+            </a:r>
+            <a:r>
+              <a:rPr lang="ko-KR" altLang="en-US" sz="1000" dirty="0"/>
+              <a:t> #0 / </a:t>
+            </a:r>
+            <a:r>
+              <a:rPr lang="ko-KR" altLang="en-US" sz="1000" dirty="0" err="1"/>
+              <a:t>Edge</a:t>
+            </a:r>
+            <a:r>
+              <a:rPr lang="ko-KR" altLang="en-US" sz="1000" dirty="0"/>
+              <a:t>=고객 </a:t>
+            </a:r>
+            <a:r>
+              <a:rPr lang="ko-KR" altLang="en-US" sz="1000" dirty="0" err="1"/>
+              <a:t>Account</a:t>
+            </a:r>
+            <a:r>
+              <a:rPr lang="ko-KR" altLang="en-US" sz="1000" dirty="0"/>
+              <a:t> #1 자동으로 열림)- </a:t>
+            </a:r>
+            <a:r>
+              <a:rPr lang="ko-KR" altLang="en-US" sz="1000" dirty="0" err="1"/>
+              <a:t>챗봇</a:t>
+            </a:r>
+            <a:r>
+              <a:rPr lang="ko-KR" altLang="en-US" sz="1000" dirty="0"/>
+              <a:t>: </a:t>
+            </a:r>
+            <a:r>
+              <a:rPr lang="ko-KR" altLang="en-US" sz="1000" dirty="0" err="1"/>
+              <a:t>insurance_agent에서</a:t>
+            </a:r>
+            <a:r>
+              <a:rPr lang="ko-KR" altLang="en-US" sz="1000" dirty="0"/>
+              <a:t> </a:t>
+            </a:r>
+            <a:r>
+              <a:rPr lang="ko-KR" altLang="en-US" sz="1000" dirty="0" err="1"/>
+              <a:t>python</a:t>
+            </a:r>
+            <a:r>
+              <a:rPr lang="ko-KR" altLang="en-US" sz="1000" dirty="0"/>
+              <a:t> web_app.py (Live </a:t>
+            </a:r>
+            <a:r>
+              <a:rPr lang="ko-KR" altLang="en-US" sz="1000" dirty="0" err="1"/>
+              <a:t>Mode로</a:t>
+            </a:r>
+            <a:r>
+              <a:rPr lang="ko-KR" altLang="en-US" sz="1000" dirty="0"/>
+              <a:t> 동작하려면 .</a:t>
+            </a:r>
+            <a:r>
+              <a:rPr lang="ko-KR" altLang="en-US" sz="1000" dirty="0" err="1"/>
+              <a:t>env에</a:t>
+            </a:r>
+            <a:r>
+              <a:rPr lang="ko-KR" altLang="en-US" sz="1000" dirty="0"/>
+              <a:t> OPENAI_API_KEY 필요 — 없으면 도구 호출 자체가 안 됨)- </a:t>
+            </a:r>
+            <a:r>
+              <a:rPr lang="ko-KR" altLang="en-US" sz="1000" dirty="0" err="1"/>
+              <a:t>E</a:t>
+            </a:r>
+            <a:r>
+              <a:rPr lang="ko-KR" altLang="en-US" sz="1000" dirty="0"/>
+              <a:t>(파트너 API)만 추가로 </a:t>
+            </a:r>
+            <a:r>
+              <a:rPr lang="ko-KR" altLang="en-US" sz="1000" dirty="0" err="1"/>
+              <a:t>insurance_agent</a:t>
+            </a:r>
+            <a:r>
+              <a:rPr lang="ko-KR" altLang="en-US" sz="1000" dirty="0"/>
+              <a:t>/.</a:t>
+            </a:r>
+            <a:r>
+              <a:rPr lang="ko-KR" altLang="en-US" sz="1000" dirty="0" err="1"/>
+              <a:t>env에</a:t>
+            </a:r>
+            <a:r>
+              <a:rPr lang="ko-KR" altLang="en-US" sz="1000" dirty="0"/>
+              <a:t> ADMIN_PASSWORD 값을 직접 채워야 함 (지금은 비어 있어서 로그인 자체가 막혀 있음 — 제가 테스트할 때도 실제 .</a:t>
+            </a:r>
+            <a:r>
+              <a:rPr lang="ko-KR" altLang="en-US" sz="1000" dirty="0" err="1"/>
+              <a:t>env엔</a:t>
+            </a:r>
+            <a:r>
+              <a:rPr lang="ko-KR" altLang="en-US" sz="1000" dirty="0"/>
+              <a:t> 안 쓰고 임시로만 넣었다 지웠습니다)---</a:t>
+            </a:r>
+            <a:r>
+              <a:rPr lang="ko-KR" altLang="en-US" sz="1000" dirty="0" err="1"/>
+              <a:t>A</a:t>
+            </a:r>
+            <a:r>
+              <a:rPr lang="ko-KR" altLang="en-US" sz="1000" dirty="0"/>
+              <a:t>. </a:t>
+            </a:r>
+            <a:r>
+              <a:rPr lang="ko-KR" altLang="en-US" sz="1000" dirty="0" err="1"/>
+              <a:t>파라메트릭보험무엇이</a:t>
+            </a:r>
+            <a:r>
+              <a:rPr lang="ko-KR" altLang="en-US" sz="1000" dirty="0"/>
+              <a:t> 되는지: 항공편 지연/폭염특보 조건 충족 시 청구 없이 자동지급.테스트:1. </a:t>
+            </a:r>
+            <a:r>
+              <a:rPr lang="ko-KR" altLang="en-US" sz="1000" dirty="0" err="1"/>
+              <a:t>Edge</a:t>
+            </a:r>
+            <a:r>
+              <a:rPr lang="ko-KR" altLang="en-US" sz="1000" dirty="0"/>
+              <a:t>(고객)에서 http://localhost:3000 → "🌦️ </a:t>
+            </a:r>
+            <a:r>
+              <a:rPr lang="ko-KR" altLang="en-US" sz="1000" dirty="0" err="1"/>
+              <a:t>파라메트릭보장</a:t>
+            </a:r>
+            <a:r>
+              <a:rPr lang="ko-KR" altLang="en-US" sz="1000" dirty="0"/>
+              <a:t>" 탭 → 상품 선택 → "선택한 상품 가입하기" (</a:t>
+            </a:r>
+            <a:r>
+              <a:rPr lang="ko-KR" altLang="en-US" sz="1000" dirty="0" err="1"/>
+              <a:t>MetaMask</a:t>
+            </a:r>
+            <a:r>
+              <a:rPr lang="ko-KR" altLang="en-US" sz="1000" dirty="0"/>
+              <a:t> 서명 2번: </a:t>
+            </a:r>
+            <a:r>
+              <a:rPr lang="ko-KR" altLang="en-US" sz="1000" dirty="0" err="1"/>
+              <a:t>approve+purchaseCoverage</a:t>
+            </a:r>
+            <a:r>
+              <a:rPr lang="ko-KR" altLang="en-US" sz="1000" dirty="0"/>
+              <a:t>)2. "내 </a:t>
+            </a:r>
+            <a:r>
+              <a:rPr lang="ko-KR" altLang="en-US" sz="1000" dirty="0" err="1"/>
+              <a:t>파라메트릭보험</a:t>
+            </a:r>
+            <a:r>
+              <a:rPr lang="ko-KR" altLang="en-US" sz="1000" dirty="0"/>
+              <a:t> </a:t>
+            </a:r>
+            <a:r>
+              <a:rPr lang="ko-KR" altLang="en-US" sz="1000" dirty="0" err="1"/>
+              <a:t>현황"에</a:t>
+            </a:r>
+            <a:r>
+              <a:rPr lang="ko-KR" altLang="en-US" sz="1000" dirty="0"/>
+              <a:t> "⏳ </a:t>
+            </a:r>
+            <a:r>
+              <a:rPr lang="ko-KR" altLang="en-US" sz="1000" dirty="0" err="1"/>
+              <a:t>관측대기</a:t>
+            </a:r>
+            <a:r>
+              <a:rPr lang="ko-KR" altLang="en-US" sz="1000" dirty="0"/>
+              <a:t>" 상태로 뜨는지 확인3. 결과를 바로 보려면 시간을 앞당김: </a:t>
+            </a:r>
+            <a:r>
+              <a:rPr lang="ko-KR" altLang="en-US" sz="1000" dirty="0" err="1"/>
+              <a:t>blockchain-dental에서</a:t>
+            </a:r>
+            <a:r>
+              <a:rPr lang="ko-KR" altLang="en-US" sz="1000" dirty="0"/>
+              <a:t> </a:t>
+            </a:r>
+            <a:r>
+              <a:rPr lang="ko-KR" altLang="en-US" sz="1000" dirty="0" err="1"/>
+              <a:t>node</a:t>
+            </a:r>
+            <a:r>
+              <a:rPr lang="ko-KR" altLang="en-US" sz="1000" dirty="0"/>
+              <a:t> </a:t>
+            </a:r>
+            <a:r>
+              <a:rPr lang="ko-KR" altLang="en-US" sz="1000" dirty="0" err="1"/>
+              <a:t>scripts</a:t>
+            </a:r>
+            <a:r>
+              <a:rPr lang="ko-KR" altLang="en-US" sz="1000" dirty="0"/>
+              <a:t>/advance-time.js 300000(초 단위, 넉넉히) → 탭 새로고침4. 또는 </a:t>
+            </a:r>
+            <a:r>
+              <a:rPr lang="ko-KR" altLang="en-US" sz="1000" dirty="0" err="1"/>
+              <a:t>CLI로</a:t>
+            </a:r>
+            <a:r>
+              <a:rPr lang="ko-KR" altLang="en-US" sz="1000" dirty="0"/>
+              <a:t> 직접: </a:t>
+            </a:r>
+            <a:r>
+              <a:rPr lang="ko-KR" altLang="en-US" sz="1000" dirty="0" err="1"/>
+              <a:t>node</a:t>
+            </a:r>
+            <a:r>
+              <a:rPr lang="ko-KR" altLang="en-US" sz="1000" dirty="0"/>
+              <a:t> </a:t>
+            </a:r>
+            <a:r>
+              <a:rPr lang="ko-KR" altLang="en-US" sz="1000" dirty="0" err="1"/>
+              <a:t>scripts</a:t>
+            </a:r>
+            <a:r>
+              <a:rPr lang="ko-KR" altLang="en-US" sz="1000" dirty="0"/>
+              <a:t>/query-parametric.js 0x</a:t>
+            </a:r>
+            <a:r>
+              <a:rPr lang="ko-KR" altLang="en-US" sz="1000" dirty="0" smtClean="0"/>
+              <a:t>고객지갑주소</a:t>
+            </a:r>
+            <a:endParaRPr lang="en-US" altLang="ko-KR" sz="1000" dirty="0" smtClean="0"/>
+          </a:p>
+          <a:p>
+            <a:endParaRPr lang="en-US" altLang="ko-KR" sz="1000" dirty="0"/>
+          </a:p>
+          <a:p>
+            <a:r>
+              <a:rPr lang="ko-KR" altLang="en-US" sz="1000" dirty="0"/>
+              <a:t>결과</a:t>
+            </a:r>
+            <a:r>
+              <a:rPr lang="en-US" altLang="ko-KR" sz="1000" dirty="0"/>
+              <a:t>: </a:t>
+            </a:r>
+            <a:r>
+              <a:rPr lang="ko-KR" altLang="en-US" sz="1000" dirty="0"/>
+              <a:t>관측 시점이 지나면 오라클</a:t>
+            </a:r>
+            <a:r>
+              <a:rPr lang="en-US" altLang="ko-KR" sz="1000" dirty="0"/>
+              <a:t>(parametric-oracle-service.js, run.bat</a:t>
+            </a:r>
+            <a:r>
+              <a:rPr lang="ko-KR" altLang="en-US" sz="1000" dirty="0"/>
+              <a:t>이 자동 기동</a:t>
+            </a:r>
+            <a:r>
+              <a:rPr lang="en-US" altLang="ko-KR" sz="1000" dirty="0"/>
+              <a:t>)</a:t>
+            </a:r>
+            <a:r>
+              <a:rPr lang="ko-KR" altLang="en-US" sz="1000" dirty="0"/>
+              <a:t>이 결정론적 시뮬레이션 </a:t>
+            </a:r>
+            <a:r>
+              <a:rPr lang="ko-KR" altLang="en-US" sz="1000" dirty="0" err="1"/>
+              <a:t>관측값으로</a:t>
+            </a:r>
+            <a:r>
+              <a:rPr lang="ko-KR" altLang="en-US" sz="1000" dirty="0"/>
+              <a:t> 자동 판정 </a:t>
+            </a:r>
+            <a:r>
+              <a:rPr lang="en-US" altLang="ko-KR" sz="1000" dirty="0"/>
+              <a:t>— "</a:t>
+            </a:r>
+            <a:r>
+              <a:rPr lang="ko-KR" altLang="en-US" sz="1000" dirty="0"/>
+              <a:t>🎯 </a:t>
+            </a:r>
+            <a:r>
+              <a:rPr lang="ko-KR" altLang="en-US" sz="1000" dirty="0" err="1"/>
+              <a:t>지급완료</a:t>
+            </a:r>
+            <a:r>
+              <a:rPr lang="en-US" altLang="ko-KR" sz="1000" dirty="0"/>
+              <a:t>"(</a:t>
+            </a:r>
+            <a:r>
+              <a:rPr lang="ko-KR" altLang="en-US" sz="1000" dirty="0"/>
+              <a:t>지갑 </a:t>
+            </a:r>
+            <a:r>
+              <a:rPr lang="en-US" altLang="ko-KR" sz="1000" dirty="0"/>
+              <a:t>USDC </a:t>
+            </a:r>
+            <a:r>
+              <a:rPr lang="ko-KR" altLang="en-US" sz="1000" dirty="0"/>
+              <a:t>잔액 증가</a:t>
+            </a:r>
+            <a:r>
+              <a:rPr lang="en-US" altLang="ko-KR" sz="1000" dirty="0"/>
+              <a:t>) </a:t>
+            </a:r>
+            <a:r>
+              <a:rPr lang="ko-KR" altLang="en-US" sz="1000" dirty="0"/>
+              <a:t>또는 </a:t>
+            </a:r>
+            <a:r>
+              <a:rPr lang="en-US" altLang="ko-KR" sz="1000" dirty="0"/>
+              <a:t>"⌛ </a:t>
+            </a:r>
+            <a:r>
+              <a:rPr lang="ko-KR" altLang="en-US" sz="1000" dirty="0"/>
+              <a:t>만료</a:t>
+            </a:r>
+            <a:r>
+              <a:rPr lang="en-US" altLang="ko-KR" sz="1000" dirty="0"/>
+              <a:t>(</a:t>
+            </a:r>
+            <a:r>
+              <a:rPr lang="ko-KR" altLang="en-US" sz="1000" dirty="0"/>
+              <a:t>미지급</a:t>
+            </a:r>
+            <a:r>
+              <a:rPr lang="en-US" altLang="ko-KR" sz="1000" dirty="0"/>
+              <a:t>)"</a:t>
+            </a:r>
+            <a:r>
+              <a:rPr lang="ko-KR" altLang="en-US" sz="1000" dirty="0"/>
+              <a:t>로 상태 전환</a:t>
+            </a:r>
+            <a:r>
+              <a:rPr lang="en-US" altLang="ko-KR" sz="1000" dirty="0"/>
+              <a:t>. ⚠️ </a:t>
+            </a:r>
+            <a:r>
+              <a:rPr lang="ko-KR" altLang="en-US" sz="1000" dirty="0"/>
+              <a:t>실제 항공</a:t>
+            </a:r>
+            <a:r>
+              <a:rPr lang="en-US" altLang="ko-KR" sz="1000" dirty="0"/>
+              <a:t>/</a:t>
+            </a:r>
+            <a:r>
+              <a:rPr lang="ko-KR" altLang="en-US" sz="1000" dirty="0"/>
+              <a:t>기상 </a:t>
+            </a:r>
+            <a:r>
+              <a:rPr lang="en-US" altLang="ko-KR" sz="1000" dirty="0"/>
+              <a:t>API</a:t>
+            </a:r>
+            <a:r>
+              <a:rPr lang="ko-KR" altLang="en-US" sz="1000" dirty="0"/>
+              <a:t>가 아니라 </a:t>
+            </a:r>
+            <a:r>
+              <a:rPr lang="en-US" altLang="ko-KR" sz="1000" dirty="0" err="1"/>
+              <a:t>coverageId</a:t>
+            </a:r>
+            <a:r>
+              <a:rPr lang="en-US" altLang="ko-KR" sz="1000" dirty="0"/>
+              <a:t> </a:t>
+            </a:r>
+            <a:r>
+              <a:rPr lang="ko-KR" altLang="en-US" sz="1000" dirty="0"/>
+              <a:t>기반 시뮬레이션이라 결과 자체는 매번 결정론적으로 같습니다</a:t>
+            </a:r>
+            <a:r>
+              <a:rPr lang="en-US" altLang="ko-KR" sz="1000" dirty="0"/>
+              <a:t>.---B. </a:t>
+            </a:r>
+            <a:r>
+              <a:rPr lang="ko-KR" altLang="en-US" sz="1000" dirty="0" err="1"/>
+              <a:t>씬파일러</a:t>
+            </a:r>
+            <a:r>
+              <a:rPr lang="ko-KR" altLang="en-US" sz="1000" dirty="0"/>
+              <a:t> 유연납입무엇이 되는지</a:t>
+            </a:r>
+            <a:r>
+              <a:rPr lang="en-US" altLang="ko-KR" sz="1000" dirty="0"/>
+              <a:t>: </a:t>
+            </a:r>
+            <a:r>
+              <a:rPr lang="ko-KR" altLang="en-US" sz="1000" dirty="0"/>
+              <a:t>청약 시 체크박스 신청 → 연체돼도</a:t>
+            </a:r>
+            <a:r>
+              <a:rPr lang="en-US" altLang="ko-KR" sz="1000" dirty="0"/>
+              <a:t>(2</a:t>
+            </a:r>
+            <a:r>
+              <a:rPr lang="ko-KR" altLang="en-US" sz="1000" dirty="0" err="1"/>
+              <a:t>회차</a:t>
+            </a:r>
+            <a:r>
+              <a:rPr lang="ko-KR" altLang="en-US" sz="1000" dirty="0"/>
+              <a:t> 납입부터</a:t>
+            </a:r>
+            <a:r>
+              <a:rPr lang="en-US" altLang="ko-KR" sz="1000" dirty="0"/>
+              <a:t>) </a:t>
+            </a:r>
+            <a:r>
+              <a:rPr lang="ko-KR" altLang="en-US" sz="1000" dirty="0"/>
+              <a:t>사람 개입 없이 </a:t>
+            </a:r>
+            <a:r>
+              <a:rPr lang="ko-KR" altLang="en-US" sz="1000" dirty="0" err="1"/>
+              <a:t>약관대출로</a:t>
+            </a:r>
+            <a:r>
+              <a:rPr lang="ko-KR" altLang="en-US" sz="1000" dirty="0"/>
+              <a:t> 자동 대환</a:t>
+            </a:r>
+            <a:r>
+              <a:rPr lang="en-US" altLang="ko-KR" sz="1000" dirty="0"/>
+              <a:t>.</a:t>
+            </a:r>
+            <a:r>
+              <a:rPr lang="ko-KR" altLang="en-US" sz="1000" dirty="0"/>
+              <a:t>빠른 검증</a:t>
+            </a:r>
+            <a:r>
+              <a:rPr lang="en-US" altLang="ko-KR" sz="1000" dirty="0"/>
+              <a:t>(</a:t>
+            </a:r>
+            <a:r>
+              <a:rPr lang="ko-KR" altLang="en-US" sz="1000" dirty="0"/>
+              <a:t>가장 확실함</a:t>
+            </a:r>
+            <a:r>
+              <a:rPr lang="en-US" altLang="ko-KR" sz="1000" dirty="0"/>
+              <a:t>): </a:t>
+            </a:r>
+            <a:r>
+              <a:rPr lang="en-US" altLang="ko-KR" sz="1000" dirty="0" err="1"/>
+              <a:t>blockchain</a:t>
+            </a:r>
+            <a:r>
+              <a:rPr lang="en-US" altLang="ko-KR" sz="1000" dirty="0"/>
+              <a:t>-dental</a:t>
+            </a:r>
+            <a:r>
+              <a:rPr lang="ko-KR" altLang="en-US" sz="1000" dirty="0"/>
+              <a:t>에서 </a:t>
+            </a:r>
+            <a:r>
+              <a:rPr lang="en-US" altLang="ko-KR" sz="1000" dirty="0" err="1"/>
+              <a:t>npx</a:t>
+            </a:r>
+            <a:r>
+              <a:rPr lang="en-US" altLang="ko-KR" sz="1000" dirty="0"/>
+              <a:t> hardhat test --</a:t>
+            </a:r>
+            <a:r>
+              <a:rPr lang="en-US" altLang="ko-KR" sz="1000" dirty="0" err="1"/>
+              <a:t>grep</a:t>
+            </a:r>
+            <a:r>
+              <a:rPr lang="en-US" altLang="ko-KR" sz="1000" dirty="0"/>
+              <a:t> "</a:t>
+            </a:r>
+            <a:r>
+              <a:rPr lang="ko-KR" altLang="en-US" sz="1000" dirty="0" err="1"/>
+              <a:t>유연납입</a:t>
+            </a:r>
+            <a:r>
+              <a:rPr lang="en-US" altLang="ko-KR" sz="1000" dirty="0"/>
+              <a:t>" → 6</a:t>
+            </a:r>
+            <a:r>
+              <a:rPr lang="ko-KR" altLang="en-US" sz="1000" dirty="0"/>
+              <a:t>개 테스트가 실제로 </a:t>
+            </a:r>
+            <a:r>
+              <a:rPr lang="ko-KR" altLang="en-US" sz="1000" dirty="0" err="1"/>
+              <a:t>온체인</a:t>
+            </a:r>
+            <a:r>
+              <a:rPr lang="ko-KR" altLang="en-US" sz="1000" dirty="0"/>
+              <a:t> 시나리오</a:t>
+            </a:r>
+            <a:r>
+              <a:rPr lang="en-US" altLang="ko-KR" sz="1000" dirty="0"/>
+              <a:t>(</a:t>
+            </a:r>
+            <a:r>
+              <a:rPr lang="ko-KR" altLang="en-US" sz="1000" dirty="0"/>
+              <a:t>대환 성공</a:t>
+            </a:r>
+            <a:r>
+              <a:rPr lang="en-US" altLang="ko-KR" sz="1000" dirty="0"/>
+              <a:t>/</a:t>
+            </a:r>
+            <a:r>
+              <a:rPr lang="en-US" altLang="ko-KR" sz="1000" dirty="0" err="1"/>
+              <a:t>flexiblePayment</a:t>
+            </a:r>
+            <a:r>
+              <a:rPr lang="en-US" altLang="ko-KR" sz="1000" dirty="0"/>
+              <a:t> </a:t>
+            </a:r>
+            <a:r>
+              <a:rPr lang="ko-KR" altLang="en-US" sz="1000" dirty="0"/>
+              <a:t>꺼짐</a:t>
+            </a:r>
+            <a:r>
+              <a:rPr lang="en-US" altLang="ko-KR" sz="1000" dirty="0"/>
+              <a:t>/</a:t>
+            </a:r>
+            <a:r>
+              <a:rPr lang="ko-KR" altLang="en-US" sz="1000" dirty="0"/>
+              <a:t>기한 전</a:t>
+            </a:r>
+            <a:r>
+              <a:rPr lang="en-US" altLang="ko-KR" sz="1000" dirty="0"/>
+              <a:t>/</a:t>
+            </a:r>
+            <a:r>
+              <a:rPr lang="ko-KR" altLang="en-US" sz="1000" dirty="0" err="1"/>
+              <a:t>기존대출</a:t>
+            </a:r>
+            <a:r>
+              <a:rPr lang="ko-KR" altLang="en-US" sz="1000" dirty="0"/>
+              <a:t> 있음 등</a:t>
+            </a:r>
+            <a:r>
+              <a:rPr lang="en-US" altLang="ko-KR" sz="1000" dirty="0"/>
+              <a:t>)</a:t>
+            </a:r>
+            <a:r>
+              <a:rPr lang="ko-KR" altLang="en-US" sz="1000" dirty="0"/>
+              <a:t>를 검증합니다</a:t>
+            </a:r>
+            <a:r>
+              <a:rPr lang="en-US" altLang="ko-KR" sz="1000" dirty="0"/>
+              <a:t>.UI </a:t>
+            </a:r>
+            <a:r>
+              <a:rPr lang="ko-KR" altLang="en-US" sz="1000" dirty="0"/>
+              <a:t>테스트</a:t>
+            </a:r>
+            <a:r>
+              <a:rPr lang="en-US" altLang="ko-KR" sz="1000" dirty="0"/>
+              <a:t>:1. "</a:t>
+            </a:r>
+            <a:r>
+              <a:rPr lang="ko-KR" altLang="en-US" sz="1000" dirty="0"/>
+              <a:t>📝 계약 심사</a:t>
+            </a:r>
+            <a:r>
+              <a:rPr lang="en-US" altLang="ko-KR" sz="1000" dirty="0"/>
+              <a:t>" </a:t>
+            </a:r>
+            <a:r>
+              <a:rPr lang="ko-KR" altLang="en-US" sz="1000" dirty="0"/>
+              <a:t>탭 → </a:t>
+            </a:r>
+            <a:r>
+              <a:rPr lang="en-US" altLang="ko-KR" sz="1000" dirty="0"/>
+              <a:t>"</a:t>
+            </a:r>
+            <a:r>
+              <a:rPr lang="ko-KR" altLang="en-US" sz="1000" dirty="0" err="1"/>
+              <a:t>씬파일러</a:t>
+            </a:r>
+            <a:r>
+              <a:rPr lang="ko-KR" altLang="en-US" sz="1000" dirty="0"/>
+              <a:t> </a:t>
+            </a:r>
+            <a:r>
+              <a:rPr lang="ko-KR" altLang="en-US" sz="1000" dirty="0" err="1"/>
+              <a:t>신용보완</a:t>
+            </a:r>
+            <a:r>
+              <a:rPr lang="ko-KR" altLang="en-US" sz="1000" dirty="0"/>
+              <a:t> </a:t>
+            </a:r>
+            <a:r>
+              <a:rPr lang="ko-KR" altLang="en-US" sz="1000" dirty="0" err="1"/>
+              <a:t>유연납입</a:t>
+            </a:r>
+            <a:r>
+              <a:rPr lang="ko-KR" altLang="en-US" sz="1000" dirty="0"/>
+              <a:t> 신청</a:t>
+            </a:r>
+            <a:r>
+              <a:rPr lang="en-US" altLang="ko-KR" sz="1000" dirty="0"/>
+              <a:t>" </a:t>
+            </a:r>
+            <a:r>
+              <a:rPr lang="ko-KR" altLang="en-US" sz="1000" dirty="0"/>
+              <a:t>체크 → 담보 </a:t>
+            </a:r>
+            <a:r>
+              <a:rPr lang="en-US" altLang="ko-KR" sz="1000" dirty="0"/>
+              <a:t>2</a:t>
+            </a:r>
+            <a:r>
+              <a:rPr lang="ko-KR" altLang="en-US" sz="1000" dirty="0"/>
+              <a:t>개 선택 후 청약</a:t>
+            </a:r>
+            <a:r>
+              <a:rPr lang="en-US" altLang="ko-KR" sz="1000" dirty="0"/>
+              <a:t>(</a:t>
+            </a:r>
+            <a:r>
+              <a:rPr lang="ko-KR" altLang="en-US" sz="1000" dirty="0"/>
+              <a:t>즉시 </a:t>
+            </a:r>
+            <a:r>
+              <a:rPr lang="ko-KR" altLang="en-US" sz="1000" dirty="0" err="1"/>
+              <a:t>자동승인</a:t>
+            </a:r>
+            <a:r>
+              <a:rPr lang="en-US" altLang="ko-KR" sz="1000" dirty="0"/>
+              <a:t>)2. "</a:t>
+            </a:r>
+            <a:r>
+              <a:rPr lang="ko-KR" altLang="en-US" sz="1000" dirty="0"/>
+              <a:t>보험료 납입</a:t>
+            </a:r>
+            <a:r>
+              <a:rPr lang="en-US" altLang="ko-KR" sz="1000" dirty="0"/>
+              <a:t>" </a:t>
+            </a:r>
+            <a:r>
+              <a:rPr lang="ko-KR" altLang="en-US" sz="1000" dirty="0"/>
+              <a:t>탭에서 </a:t>
+            </a:r>
+            <a:r>
+              <a:rPr lang="en-US" altLang="ko-KR" sz="1000" dirty="0"/>
+              <a:t>2</a:t>
+            </a:r>
+            <a:r>
+              <a:rPr lang="ko-KR" altLang="en-US" sz="1000" dirty="0"/>
+              <a:t>회 납입</a:t>
+            </a:r>
+            <a:r>
+              <a:rPr lang="en-US" altLang="ko-KR" sz="1000" dirty="0"/>
+              <a:t>(1</a:t>
+            </a:r>
+            <a:r>
+              <a:rPr lang="ko-KR" altLang="en-US" sz="1000" dirty="0" err="1"/>
+              <a:t>회차만으론</a:t>
+            </a:r>
+            <a:r>
+              <a:rPr lang="ko-KR" altLang="en-US" sz="1000" dirty="0"/>
+              <a:t> 대출한도가 안 나옴 </a:t>
+            </a:r>
+            <a:r>
+              <a:rPr lang="en-US" altLang="ko-KR" sz="1000" dirty="0"/>
+              <a:t>— </a:t>
+            </a:r>
+            <a:r>
+              <a:rPr lang="ko-KR" altLang="en-US" sz="1000" dirty="0" err="1"/>
+              <a:t>해지환급금</a:t>
+            </a:r>
+            <a:r>
+              <a:rPr lang="ko-KR" altLang="en-US" sz="1000" dirty="0"/>
+              <a:t> 기반이라 최소 </a:t>
+            </a:r>
+            <a:r>
+              <a:rPr lang="en-US" altLang="ko-KR" sz="1000" dirty="0"/>
+              <a:t>2</a:t>
+            </a:r>
+            <a:r>
+              <a:rPr lang="ko-KR" altLang="en-US" sz="1000" dirty="0"/>
+              <a:t>회 필요</a:t>
+            </a:r>
+            <a:r>
+              <a:rPr lang="en-US" altLang="ko-KR" sz="1000" dirty="0"/>
+              <a:t>)3. run.bat</a:t>
+            </a:r>
+            <a:r>
+              <a:rPr lang="ko-KR" altLang="en-US" sz="1000" dirty="0"/>
+              <a:t>이 띄운 </a:t>
+            </a:r>
+            <a:r>
+              <a:rPr lang="en-US" altLang="ko-KR" sz="1000" dirty="0"/>
+              <a:t>premium-scheduler.js </a:t>
+            </a:r>
+            <a:r>
+              <a:rPr lang="ko-KR" altLang="en-US" sz="1000" dirty="0"/>
+              <a:t>콘솔 창을 보면서</a:t>
+            </a:r>
+            <a:r>
+              <a:rPr lang="en-US" altLang="ko-KR" sz="1000" dirty="0"/>
+              <a:t>, </a:t>
+            </a:r>
+            <a:r>
+              <a:rPr lang="ko-KR" altLang="en-US" sz="1000" dirty="0"/>
+              <a:t>다음 납입 기한을 넘기고</a:t>
+            </a:r>
+            <a:r>
+              <a:rPr lang="en-US" altLang="ko-KR" sz="1000" dirty="0"/>
+              <a:t>(approve</a:t>
+            </a:r>
+            <a:r>
+              <a:rPr lang="ko-KR" altLang="en-US" sz="1000" dirty="0"/>
+              <a:t>를 일부러 안 해두면 연체 상황 재현</a:t>
+            </a:r>
+            <a:r>
+              <a:rPr lang="en-US" altLang="ko-KR" sz="1000" dirty="0"/>
+              <a:t>) 30</a:t>
+            </a:r>
+            <a:r>
+              <a:rPr lang="ko-KR" altLang="en-US" sz="1000" dirty="0"/>
+              <a:t>초 </a:t>
+            </a:r>
+            <a:r>
+              <a:rPr lang="ko-KR" altLang="en-US" sz="1000" dirty="0" err="1"/>
+              <a:t>폴링</a:t>
+            </a:r>
+            <a:r>
+              <a:rPr lang="ko-KR" altLang="en-US" sz="1000" dirty="0"/>
+              <a:t> 로그 확인결과</a:t>
+            </a:r>
+            <a:r>
+              <a:rPr lang="en-US" altLang="ko-KR" sz="1000" dirty="0"/>
+              <a:t>: </a:t>
+            </a:r>
+            <a:r>
+              <a:rPr lang="ko-KR" altLang="en-US" sz="1000" dirty="0"/>
+              <a:t>로그에 🔁 </a:t>
+            </a:r>
+            <a:r>
+              <a:rPr lang="ko-KR" altLang="en-US" sz="1000" dirty="0" err="1"/>
+              <a:t>유연납입</a:t>
+            </a:r>
+            <a:r>
+              <a:rPr lang="ko-KR" altLang="en-US" sz="1000" dirty="0"/>
+              <a:t> </a:t>
+            </a:r>
+            <a:r>
+              <a:rPr lang="en-US" altLang="ko-KR" sz="1000" dirty="0"/>
+              <a:t>— </a:t>
+            </a:r>
+            <a:r>
+              <a:rPr lang="ko-KR" altLang="en-US" sz="1000" dirty="0"/>
+              <a:t>증권 </a:t>
+            </a:r>
+            <a:r>
+              <a:rPr lang="en-US" altLang="ko-KR" sz="1000" dirty="0"/>
+              <a:t>#N </a:t>
+            </a:r>
+            <a:r>
+              <a:rPr lang="ko-KR" altLang="en-US" sz="1000" dirty="0"/>
+              <a:t>연체 보험료를 </a:t>
+            </a:r>
+            <a:r>
+              <a:rPr lang="ko-KR" altLang="en-US" sz="1000" dirty="0" err="1"/>
+              <a:t>약관대출로</a:t>
+            </a:r>
+            <a:r>
+              <a:rPr lang="ko-KR" altLang="en-US" sz="1000" dirty="0"/>
+              <a:t> 자동 대환 완료</a:t>
+            </a:r>
+            <a:r>
+              <a:rPr lang="en-US" altLang="ko-KR" sz="1000" dirty="0"/>
+              <a:t>, "</a:t>
+            </a:r>
+            <a:r>
+              <a:rPr lang="ko-KR" altLang="en-US" sz="1000" dirty="0"/>
+              <a:t>💵 약관대출</a:t>
+            </a:r>
+            <a:r>
+              <a:rPr lang="en-US" altLang="ko-KR" sz="1000" dirty="0"/>
+              <a:t>" </a:t>
+            </a:r>
+            <a:r>
+              <a:rPr lang="ko-KR" altLang="en-US" sz="1000" dirty="0"/>
+              <a:t>탭에 대출 원금</a:t>
+            </a:r>
+            <a:r>
+              <a:rPr lang="en-US" altLang="ko-KR" sz="1000" dirty="0"/>
+              <a:t>=</a:t>
+            </a:r>
+            <a:r>
+              <a:rPr lang="ko-KR" altLang="en-US" sz="1000" dirty="0" err="1"/>
+              <a:t>월보험료로</a:t>
+            </a:r>
+            <a:r>
+              <a:rPr lang="ko-KR" altLang="en-US" sz="1000" dirty="0"/>
+              <a:t> 자동 표시</a:t>
+            </a:r>
+            <a:r>
+              <a:rPr lang="en-US" altLang="ko-KR" sz="1000" dirty="0"/>
+              <a:t>.---C. </a:t>
+            </a:r>
+            <a:r>
+              <a:rPr lang="ko-KR" altLang="en-US" sz="1000" dirty="0" err="1"/>
+              <a:t>웰니스</a:t>
+            </a:r>
+            <a:r>
+              <a:rPr lang="ko-KR" altLang="en-US" sz="1000" dirty="0"/>
+              <a:t> 연동 동적 보험료 </a:t>
+            </a:r>
+            <a:r>
+              <a:rPr lang="en-US" altLang="ko-KR" sz="1000" dirty="0"/>
+              <a:t>(</a:t>
+            </a:r>
+            <a:r>
+              <a:rPr lang="ko-KR" altLang="en-US" sz="1000" dirty="0"/>
+              <a:t>제가 직접 재현했던 것</a:t>
+            </a:r>
+            <a:r>
+              <a:rPr lang="en-US" altLang="ko-KR" sz="1000" dirty="0"/>
+              <a:t>)</a:t>
+            </a:r>
+            <a:r>
+              <a:rPr lang="ko-KR" altLang="en-US" sz="1000" dirty="0"/>
+              <a:t>테스트</a:t>
+            </a:r>
+            <a:r>
+              <a:rPr lang="en-US" altLang="ko-KR" sz="1000" dirty="0"/>
+              <a:t>: </a:t>
+            </a:r>
+            <a:r>
+              <a:rPr lang="ko-KR" altLang="en-US" sz="1000" dirty="0" err="1"/>
+              <a:t>챗봇</a:t>
+            </a:r>
+            <a:r>
+              <a:rPr lang="en-US" altLang="ko-KR" sz="1000" dirty="0"/>
+              <a:t>(http://localhost:5000)</a:t>
+            </a:r>
+            <a:r>
+              <a:rPr lang="ko-KR" altLang="en-US" sz="1000" dirty="0"/>
+              <a:t>에서 지갑 등록 후</a:t>
+            </a:r>
+            <a:r>
+              <a:rPr lang="en-US" altLang="ko-KR" sz="1000" dirty="0"/>
+              <a:t>,1</a:t>
+            </a:r>
+            <a:r>
+              <a:rPr lang="ko-KR" altLang="en-US" sz="1000" dirty="0"/>
+              <a:t>차</a:t>
+            </a:r>
+            <a:r>
+              <a:rPr lang="en-US" altLang="ko-KR" sz="1000" dirty="0"/>
+              <a:t>: "48</a:t>
+            </a:r>
+            <a:r>
+              <a:rPr lang="ko-KR" altLang="en-US" sz="1000" dirty="0"/>
+              <a:t>세 남자</a:t>
+            </a:r>
+            <a:r>
+              <a:rPr lang="en-US" altLang="ko-KR" sz="1000" dirty="0"/>
+              <a:t>, </a:t>
+            </a:r>
+            <a:r>
+              <a:rPr lang="ko-KR" altLang="en-US" sz="1000" dirty="0"/>
+              <a:t>키</a:t>
+            </a:r>
+            <a:r>
+              <a:rPr lang="en-US" altLang="ko-KR" sz="1000" dirty="0"/>
+              <a:t>172 </a:t>
+            </a:r>
+            <a:r>
+              <a:rPr lang="ko-KR" altLang="en-US" sz="1000" dirty="0"/>
+              <a:t>몸무게</a:t>
+            </a:r>
+            <a:r>
+              <a:rPr lang="en-US" altLang="ko-KR" sz="1000" dirty="0"/>
+              <a:t>95, </a:t>
+            </a:r>
+            <a:r>
+              <a:rPr lang="ko-KR" altLang="en-US" sz="1000" dirty="0"/>
+              <a:t>혈압</a:t>
+            </a:r>
+            <a:r>
+              <a:rPr lang="en-US" altLang="ko-KR" sz="1000" dirty="0"/>
+              <a:t>150/95, </a:t>
+            </a:r>
+            <a:r>
+              <a:rPr lang="ko-KR" altLang="en-US" sz="1000" dirty="0"/>
+              <a:t>중성지방</a:t>
+            </a:r>
+            <a:r>
+              <a:rPr lang="en-US" altLang="ko-KR" sz="1000" dirty="0"/>
+              <a:t>250, HDL35, </a:t>
+            </a:r>
+            <a:r>
+              <a:rPr lang="ko-KR" altLang="en-US" sz="1000" dirty="0" err="1"/>
+              <a:t>감마지티피</a:t>
+            </a:r>
+            <a:r>
+              <a:rPr lang="en-US" altLang="ko-KR" sz="1000" dirty="0"/>
+              <a:t>90, </a:t>
+            </a:r>
+            <a:r>
+              <a:rPr lang="ko-KR" altLang="en-US" sz="1000" dirty="0"/>
+              <a:t>흡연</a:t>
+            </a:r>
+            <a:r>
+              <a:rPr lang="en-US" altLang="ko-KR" sz="1000" dirty="0"/>
+              <a:t>, </a:t>
+            </a:r>
+            <a:r>
+              <a:rPr lang="ko-KR" altLang="en-US" sz="1000" dirty="0"/>
+              <a:t>음주 </a:t>
+            </a:r>
+            <a:r>
+              <a:rPr lang="en-US" altLang="ko-KR" sz="1000" dirty="0"/>
+              <a:t>— </a:t>
+            </a:r>
+            <a:r>
+              <a:rPr lang="ko-KR" altLang="en-US" sz="1000" dirty="0"/>
+              <a:t>건강 상태 알려줘</a:t>
+            </a:r>
+            <a:r>
+              <a:rPr lang="en-US" altLang="ko-KR" sz="1000" dirty="0"/>
+              <a:t>"2</a:t>
+            </a:r>
+            <a:r>
+              <a:rPr lang="ko-KR" altLang="en-US" sz="1000" dirty="0"/>
+              <a:t>차</a:t>
+            </a:r>
+            <a:r>
+              <a:rPr lang="en-US" altLang="ko-KR" sz="1000" dirty="0"/>
+              <a:t>(</a:t>
+            </a:r>
+            <a:r>
+              <a:rPr lang="ko-KR" altLang="en-US" sz="1000" dirty="0"/>
+              <a:t>개선</a:t>
+            </a:r>
+            <a:r>
+              <a:rPr lang="en-US" altLang="ko-KR" sz="1000" dirty="0"/>
+              <a:t>): "</a:t>
+            </a:r>
+            <a:r>
+              <a:rPr lang="ko-KR" altLang="en-US" sz="1000" dirty="0"/>
+              <a:t>키</a:t>
+            </a:r>
+            <a:r>
+              <a:rPr lang="en-US" altLang="ko-KR" sz="1000" dirty="0"/>
+              <a:t>172 </a:t>
+            </a:r>
+            <a:r>
+              <a:rPr lang="ko-KR" altLang="en-US" sz="1000" dirty="0"/>
+              <a:t>몸무게</a:t>
+            </a:r>
+            <a:r>
+              <a:rPr lang="en-US" altLang="ko-KR" sz="1000" dirty="0"/>
+              <a:t>78, </a:t>
+            </a:r>
+            <a:r>
+              <a:rPr lang="ko-KR" altLang="en-US" sz="1000" dirty="0"/>
+              <a:t>혈압</a:t>
+            </a:r>
+            <a:r>
+              <a:rPr lang="en-US" altLang="ko-KR" sz="1000" dirty="0"/>
+              <a:t>120/78, </a:t>
+            </a:r>
+            <a:r>
+              <a:rPr lang="ko-KR" altLang="en-US" sz="1000" dirty="0"/>
+              <a:t>중성지방</a:t>
+            </a:r>
+            <a:r>
+              <a:rPr lang="en-US" altLang="ko-KR" sz="1000" dirty="0"/>
+              <a:t>120, HDL55, </a:t>
+            </a:r>
+            <a:r>
+              <a:rPr lang="ko-KR" altLang="en-US" sz="1000" dirty="0" err="1"/>
+              <a:t>감마지티피</a:t>
+            </a:r>
+            <a:r>
+              <a:rPr lang="en-US" altLang="ko-KR" sz="1000" dirty="0"/>
+              <a:t>25, </a:t>
+            </a:r>
+            <a:r>
+              <a:rPr lang="ko-KR" altLang="en-US" sz="1000" dirty="0" err="1"/>
+              <a:t>비흡연</a:t>
+            </a:r>
+            <a:r>
+              <a:rPr lang="en-US" altLang="ko-KR" sz="1000" dirty="0"/>
+              <a:t>, </a:t>
+            </a:r>
+            <a:r>
+              <a:rPr lang="ko-KR" altLang="en-US" sz="1000" dirty="0" err="1"/>
+              <a:t>비음주로</a:t>
+            </a:r>
+            <a:r>
+              <a:rPr lang="ko-KR" altLang="en-US" sz="1000" dirty="0"/>
+              <a:t> 좋아졌어</a:t>
+            </a:r>
+            <a:r>
+              <a:rPr lang="en-US" altLang="ko-KR" sz="1000" dirty="0"/>
+              <a:t>"</a:t>
+            </a:r>
+            <a:r>
+              <a:rPr lang="ko-KR" altLang="en-US" sz="1000" dirty="0"/>
+              <a:t>결과</a:t>
+            </a:r>
+            <a:r>
+              <a:rPr lang="en-US" altLang="ko-KR" sz="1000" dirty="0"/>
+              <a:t>: 1</a:t>
+            </a:r>
+            <a:r>
+              <a:rPr lang="ko-KR" altLang="en-US" sz="1000" dirty="0"/>
+              <a:t>차는 </a:t>
+            </a:r>
+            <a:r>
+              <a:rPr lang="en-US" altLang="ko-KR" sz="1000" dirty="0"/>
+              <a:t>"</a:t>
+            </a:r>
+            <a:r>
+              <a:rPr lang="ko-KR" altLang="en-US" sz="1000" dirty="0"/>
+              <a:t>최초 체크인 등록</a:t>
+            </a:r>
+            <a:r>
+              <a:rPr lang="en-US" altLang="ko-KR" sz="1000" dirty="0"/>
+              <a:t>"</a:t>
+            </a:r>
+            <a:r>
+              <a:rPr lang="ko-KR" altLang="en-US" sz="1000" dirty="0"/>
+              <a:t>만</a:t>
+            </a:r>
+            <a:r>
+              <a:rPr lang="en-US" altLang="ko-KR" sz="1000" dirty="0"/>
+              <a:t>, 2</a:t>
+            </a:r>
+            <a:r>
+              <a:rPr lang="ko-KR" altLang="en-US" sz="1000" dirty="0"/>
+              <a:t>차에서 </a:t>
+            </a:r>
+            <a:r>
+              <a:rPr lang="ko-KR" altLang="en-US" sz="1000" dirty="0" err="1"/>
+              <a:t>챗봇이</a:t>
+            </a:r>
+            <a:r>
+              <a:rPr lang="ko-KR" altLang="en-US" sz="1000" dirty="0"/>
+              <a:t> </a:t>
+            </a:r>
+            <a:r>
+              <a:rPr lang="en-US" altLang="ko-KR" sz="1000" dirty="0"/>
+              <a:t>"N% </a:t>
+            </a:r>
+            <a:r>
+              <a:rPr lang="ko-KR" altLang="en-US" sz="1000" dirty="0"/>
+              <a:t>할인 조정</a:t>
+            </a:r>
+            <a:r>
+              <a:rPr lang="en-US" altLang="ko-KR" sz="1000" dirty="0"/>
+              <a:t>" </a:t>
+            </a:r>
+            <a:r>
+              <a:rPr lang="ko-KR" altLang="en-US" sz="1000" dirty="0"/>
+              <a:t>메시지 응답 </a:t>
+            </a:r>
+            <a:r>
+              <a:rPr lang="en-US" altLang="ko-KR" sz="1000" dirty="0"/>
+              <a:t>+ node scripts/query-policy.js </a:t>
+            </a:r>
+            <a:r>
+              <a:rPr lang="ko-KR" altLang="en-US" sz="1000" dirty="0" err="1"/>
+              <a:t>지갑주소로</a:t>
+            </a:r>
+            <a:r>
+              <a:rPr lang="ko-KR" altLang="en-US" sz="1000" dirty="0"/>
+              <a:t> </a:t>
+            </a:r>
+            <a:r>
+              <a:rPr lang="en-US" altLang="ko-KR" sz="1000" dirty="0" err="1"/>
+              <a:t>monthlyPremium</a:t>
+            </a:r>
+            <a:r>
+              <a:rPr lang="ko-KR" altLang="en-US" sz="1000" dirty="0"/>
+              <a:t>이 실제로 줄어든 걸 직접 확인 가능</a:t>
+            </a:r>
+            <a:r>
+              <a:rPr lang="en-US" altLang="ko-KR" sz="1000" dirty="0"/>
+              <a:t>. </a:t>
+            </a:r>
+            <a:r>
+              <a:rPr lang="ko-KR" altLang="en-US" sz="1000" dirty="0"/>
+              <a:t>프론트 </a:t>
+            </a:r>
+            <a:r>
+              <a:rPr lang="en-US" altLang="ko-KR" sz="1000" dirty="0"/>
+              <a:t>"</a:t>
+            </a:r>
+            <a:r>
+              <a:rPr lang="ko-KR" altLang="en-US" sz="1000" dirty="0"/>
+              <a:t>보험료 납입</a:t>
+            </a:r>
+            <a:r>
+              <a:rPr lang="en-US" altLang="ko-KR" sz="1000" dirty="0"/>
+              <a:t>" </a:t>
+            </a:r>
+            <a:r>
+              <a:rPr lang="ko-KR" altLang="en-US" sz="1000" dirty="0"/>
+              <a:t>탭 이력에도 </a:t>
+            </a:r>
+            <a:r>
+              <a:rPr lang="en-US" altLang="ko-KR" sz="1000" dirty="0"/>
+              <a:t>"</a:t>
+            </a:r>
+            <a:r>
+              <a:rPr lang="ko-KR" altLang="en-US" sz="1000" dirty="0"/>
+              <a:t>🩺 </a:t>
+            </a:r>
+            <a:r>
+              <a:rPr lang="ko-KR" altLang="en-US" sz="1000" dirty="0" err="1"/>
+              <a:t>웰니스조정</a:t>
+            </a:r>
+            <a:r>
+              <a:rPr lang="en-US" altLang="ko-KR" sz="1000" dirty="0"/>
+              <a:t>" </a:t>
+            </a:r>
+            <a:r>
+              <a:rPr lang="ko-KR" altLang="en-US" sz="1000" dirty="0"/>
+              <a:t>배지 행 추가됨</a:t>
+            </a:r>
+            <a:r>
+              <a:rPr lang="en-US" altLang="ko-KR" sz="1000" dirty="0" smtClean="0"/>
+              <a:t>.---</a:t>
+            </a:r>
+          </a:p>
+          <a:p>
+            <a:endParaRPr lang="en-US" altLang="ko-KR" sz="1000" dirty="0"/>
+          </a:p>
+          <a:p>
+            <a:r>
+              <a:rPr lang="en-US" altLang="ko-KR" sz="1000" dirty="0"/>
+              <a:t>D. </a:t>
+            </a:r>
+            <a:r>
+              <a:rPr lang="ko-KR" altLang="en-US" sz="1000" dirty="0"/>
+              <a:t>재보험풀테스트</a:t>
+            </a:r>
+            <a:r>
+              <a:rPr lang="en-US" altLang="ko-KR" sz="1000" dirty="0"/>
+              <a:t>:1. </a:t>
+            </a:r>
+            <a:r>
+              <a:rPr lang="ko-KR" altLang="en-US" sz="1000" dirty="0"/>
+              <a:t>아무 계정에서 </a:t>
+            </a:r>
+            <a:r>
+              <a:rPr lang="en-US" altLang="ko-KR" sz="1000" dirty="0"/>
+              <a:t>"</a:t>
+            </a:r>
+            <a:r>
+              <a:rPr lang="ko-KR" altLang="en-US" sz="1000" dirty="0"/>
+              <a:t>🛡️ </a:t>
+            </a:r>
+            <a:r>
+              <a:rPr lang="ko-KR" altLang="en-US" sz="1000" dirty="0" err="1"/>
+              <a:t>재보험풀</a:t>
+            </a:r>
+            <a:r>
+              <a:rPr lang="en-US" altLang="ko-KR" sz="1000" dirty="0"/>
+              <a:t>" </a:t>
+            </a:r>
+            <a:r>
+              <a:rPr lang="ko-KR" altLang="en-US" sz="1000" dirty="0"/>
+              <a:t>탭 → 금액 입력 → </a:t>
+            </a:r>
+            <a:r>
+              <a:rPr lang="en-US" altLang="ko-KR" sz="1000" dirty="0"/>
+              <a:t>"</a:t>
+            </a:r>
+            <a:r>
+              <a:rPr lang="ko-KR" altLang="en-US" sz="1000" dirty="0"/>
+              <a:t>예치하기</a:t>
+            </a:r>
+            <a:r>
+              <a:rPr lang="en-US" altLang="ko-KR" sz="1000" dirty="0"/>
+              <a:t>"(</a:t>
+            </a:r>
+            <a:r>
+              <a:rPr lang="ko-KR" altLang="en-US" sz="1000" dirty="0"/>
+              <a:t>서명 </a:t>
+            </a:r>
+            <a:r>
+              <a:rPr lang="en-US" altLang="ko-KR" sz="1000" dirty="0"/>
+              <a:t>2</a:t>
+            </a:r>
+            <a:r>
+              <a:rPr lang="ko-KR" altLang="en-US" sz="1000" dirty="0"/>
+              <a:t>번</a:t>
+            </a:r>
+            <a:r>
+              <a:rPr lang="en-US" altLang="ko-KR" sz="1000" dirty="0"/>
+              <a:t>)2. </a:t>
+            </a:r>
+            <a:r>
+              <a:rPr lang="ko-KR" altLang="en-US" sz="1000" dirty="0"/>
+              <a:t>다른 계정으로 </a:t>
+            </a:r>
+            <a:r>
+              <a:rPr lang="en-US" altLang="ko-KR" sz="1000" dirty="0"/>
+              <a:t>"</a:t>
+            </a:r>
+            <a:r>
+              <a:rPr lang="ko-KR" altLang="en-US" sz="1000" dirty="0"/>
+              <a:t>보험료 납입</a:t>
+            </a:r>
+            <a:r>
+              <a:rPr lang="en-US" altLang="ko-KR" sz="1000" dirty="0"/>
+              <a:t>" </a:t>
+            </a:r>
+            <a:r>
+              <a:rPr lang="ko-KR" altLang="en-US" sz="1000" dirty="0"/>
+              <a:t>탭에서 증권 </a:t>
+            </a:r>
+            <a:r>
+              <a:rPr lang="en-US" altLang="ko-KR" sz="1000" dirty="0"/>
+              <a:t>1</a:t>
+            </a:r>
+            <a:r>
+              <a:rPr lang="ko-KR" altLang="en-US" sz="1000" dirty="0"/>
+              <a:t>건 납입</a:t>
+            </a:r>
+            <a:r>
+              <a:rPr lang="en-US" altLang="ko-KR" sz="1000" dirty="0"/>
+              <a:t>3. </a:t>
+            </a:r>
+            <a:r>
+              <a:rPr lang="ko-KR" altLang="en-US" sz="1000" dirty="0" err="1"/>
+              <a:t>재보험풀</a:t>
+            </a:r>
+            <a:r>
+              <a:rPr lang="ko-KR" altLang="en-US" sz="1000" dirty="0"/>
+              <a:t> 탭 </a:t>
+            </a:r>
+            <a:r>
+              <a:rPr lang="ko-KR" altLang="en-US" sz="1000" dirty="0" err="1"/>
+              <a:t>새로고침</a:t>
+            </a:r>
+            <a:r>
+              <a:rPr lang="ko-KR" altLang="en-US" sz="1000" dirty="0"/>
+              <a:t> → 풀 총자산이 납입액 </a:t>
+            </a:r>
+            <a:r>
+              <a:rPr lang="en-US" altLang="ko-KR" sz="1000" dirty="0"/>
+              <a:t>× 5%</a:t>
+            </a:r>
+            <a:r>
+              <a:rPr lang="ko-KR" altLang="en-US" sz="1000" dirty="0"/>
+              <a:t>만큼 늘었는지</a:t>
+            </a:r>
+            <a:r>
+              <a:rPr lang="en-US" altLang="ko-KR" sz="1000" dirty="0"/>
+              <a:t>, </a:t>
+            </a:r>
+            <a:r>
+              <a:rPr lang="ko-KR" altLang="en-US" sz="1000" dirty="0"/>
+              <a:t>내 </a:t>
+            </a:r>
+            <a:r>
+              <a:rPr lang="ko-KR" altLang="en-US" sz="1000" dirty="0" err="1"/>
+              <a:t>지분가치도</a:t>
+            </a:r>
+            <a:r>
+              <a:rPr lang="ko-KR" altLang="en-US" sz="1000" dirty="0"/>
+              <a:t> 비례 상승했는지 확인</a:t>
+            </a:r>
+            <a:r>
+              <a:rPr lang="en-US" altLang="ko-KR" sz="1000" dirty="0"/>
+              <a:t>4. CLI: node scripts/query-reinsurance.js 0x</a:t>
+            </a:r>
+            <a:r>
+              <a:rPr lang="ko-KR" altLang="en-US" sz="1000" dirty="0"/>
+              <a:t>투자자지갑결과</a:t>
+            </a:r>
+            <a:r>
+              <a:rPr lang="en-US" altLang="ko-KR" sz="1000" dirty="0"/>
+              <a:t>: </a:t>
+            </a:r>
+            <a:r>
+              <a:rPr lang="ko-KR" altLang="en-US" sz="1000" dirty="0"/>
+              <a:t>예</a:t>
+            </a:r>
+            <a:r>
+              <a:rPr lang="en-US" altLang="ko-KR" sz="1000" dirty="0"/>
+              <a:t>) </a:t>
+            </a:r>
+            <a:r>
+              <a:rPr lang="ko-KR" altLang="en-US" sz="1000" dirty="0"/>
+              <a:t>월 보험료 </a:t>
+            </a:r>
+            <a:r>
+              <a:rPr lang="en-US" altLang="ko-KR" sz="1000" dirty="0"/>
+              <a:t>$50 </a:t>
+            </a:r>
+            <a:r>
+              <a:rPr lang="ko-KR" altLang="en-US" sz="1000" dirty="0"/>
+              <a:t>납입 → 풀 자산 </a:t>
+            </a:r>
+            <a:r>
+              <a:rPr lang="en-US" altLang="ko-KR" sz="1000" dirty="0"/>
+              <a:t>+$2.50. </a:t>
+            </a:r>
+            <a:r>
+              <a:rPr lang="ko-KR" altLang="en-US" sz="1000" dirty="0"/>
+              <a:t>고정 이자가 아니라 실제 납입에 연동되므로</a:t>
+            </a:r>
+            <a:r>
+              <a:rPr lang="en-US" altLang="ko-KR" sz="1000" dirty="0"/>
+              <a:t>, </a:t>
+            </a:r>
+            <a:r>
+              <a:rPr lang="ko-KR" altLang="en-US" sz="1000" dirty="0"/>
+              <a:t>납입이 없으면 </a:t>
+            </a:r>
+            <a:r>
+              <a:rPr lang="ko-KR" altLang="en-US" sz="1000" dirty="0" err="1"/>
+              <a:t>지분가치도</a:t>
+            </a:r>
+            <a:r>
+              <a:rPr lang="ko-KR" altLang="en-US" sz="1000" dirty="0"/>
+              <a:t> 그대로입니다</a:t>
+            </a:r>
+            <a:r>
+              <a:rPr lang="en-US" altLang="ko-KR" sz="1000" dirty="0"/>
+              <a:t>.---E. B2B </a:t>
+            </a:r>
+            <a:r>
+              <a:rPr lang="ko-KR" altLang="en-US" sz="1000" dirty="0"/>
+              <a:t>파트너 </a:t>
+            </a:r>
+            <a:r>
+              <a:rPr lang="en-US" altLang="ko-KR" sz="1000" dirty="0"/>
+              <a:t>API</a:t>
+            </a:r>
+            <a:r>
+              <a:rPr lang="ko-KR" altLang="en-US" sz="1000" dirty="0"/>
+              <a:t>테스트</a:t>
+            </a:r>
+            <a:r>
+              <a:rPr lang="en-US" altLang="ko-KR" sz="1000" dirty="0"/>
+              <a:t>(curl):# 1. .</a:t>
+            </a:r>
+            <a:r>
+              <a:rPr lang="en-US" altLang="ko-KR" sz="1000" dirty="0" err="1"/>
+              <a:t>env</a:t>
+            </a:r>
+            <a:r>
+              <a:rPr lang="ko-KR" altLang="en-US" sz="1000" dirty="0"/>
+              <a:t>에 </a:t>
+            </a:r>
+            <a:r>
+              <a:rPr lang="en-US" altLang="ko-KR" sz="1000" dirty="0"/>
+              <a:t>ADMIN_PASSWORD </a:t>
+            </a:r>
+            <a:r>
+              <a:rPr lang="ko-KR" altLang="en-US" sz="1000" dirty="0"/>
+              <a:t>채운 뒤 서버 </a:t>
+            </a:r>
+            <a:r>
+              <a:rPr lang="ko-KR" altLang="en-US" sz="1000" dirty="0" err="1"/>
+              <a:t>재시작</a:t>
+            </a:r>
+            <a:r>
+              <a:rPr lang="en-US" altLang="ko-KR" sz="1000" dirty="0"/>
+              <a:t># 2. </a:t>
+            </a:r>
+            <a:r>
+              <a:rPr lang="ko-KR" altLang="en-US" sz="1000" dirty="0"/>
+              <a:t>브라우저 </a:t>
+            </a:r>
+            <a:r>
+              <a:rPr lang="en-US" altLang="ko-KR" sz="1000" dirty="0"/>
+              <a:t>http://localhost:5000/admin/login → </a:t>
+            </a:r>
+            <a:r>
+              <a:rPr lang="ko-KR" altLang="en-US" sz="1000" dirty="0"/>
+              <a:t>로그인 → </a:t>
+            </a:r>
+            <a:r>
+              <a:rPr lang="en-US" altLang="ko-KR" sz="1000" dirty="0"/>
+              <a:t>/admin/partners</a:t>
+            </a:r>
+            <a:r>
+              <a:rPr lang="ko-KR" altLang="en-US" sz="1000" dirty="0"/>
+              <a:t>에서 키 발급</a:t>
+            </a:r>
+            <a:r>
+              <a:rPr lang="en-US" altLang="ko-KR" sz="1000" dirty="0"/>
+              <a:t>curl -o /dev/null -w "%{</a:t>
+            </a:r>
+            <a:r>
+              <a:rPr lang="en-US" altLang="ko-KR" sz="1000" dirty="0" err="1"/>
+              <a:t>http_code</a:t>
+            </a:r>
+            <a:r>
+              <a:rPr lang="en-US" altLang="ko-KR" sz="1000" dirty="0"/>
+              <a:t>}\n" "http://localhost:5000/</a:t>
+            </a:r>
+            <a:r>
+              <a:rPr lang="en-US" altLang="ko-KR" sz="1000" dirty="0" err="1"/>
+              <a:t>api</a:t>
+            </a:r>
+            <a:r>
+              <a:rPr lang="en-US" altLang="ko-KR" sz="1000" dirty="0"/>
+              <a:t>/partner/v1/dental/</a:t>
+            </a:r>
+            <a:r>
+              <a:rPr lang="en-US" altLang="ko-KR" sz="1000" dirty="0" err="1"/>
+              <a:t>status?wallet</a:t>
+            </a:r>
+            <a:r>
+              <a:rPr lang="en-US" altLang="ko-KR" sz="1000" dirty="0"/>
+              <a:t>=0x</a:t>
+            </a:r>
+            <a:r>
+              <a:rPr lang="ko-KR" altLang="en-US" sz="1000" dirty="0" err="1"/>
+              <a:t>고객지갑</a:t>
+            </a:r>
+            <a:r>
+              <a:rPr lang="en-US" altLang="ko-KR" sz="1000" dirty="0"/>
+              <a:t>"          # </a:t>
+            </a:r>
+            <a:r>
+              <a:rPr lang="ko-KR" altLang="en-US" sz="1000" dirty="0"/>
+              <a:t>키 없음 → </a:t>
+            </a:r>
+            <a:r>
+              <a:rPr lang="en-US" altLang="ko-KR" sz="1000" dirty="0"/>
+              <a:t>401curl -H "X-</a:t>
+            </a:r>
+            <a:r>
+              <a:rPr lang="en-US" altLang="ko-KR" sz="1000" dirty="0" err="1"/>
+              <a:t>Api</a:t>
+            </a:r>
+            <a:r>
+              <a:rPr lang="en-US" altLang="ko-KR" sz="1000" dirty="0"/>
+              <a:t>-Key: </a:t>
+            </a:r>
+            <a:r>
+              <a:rPr lang="ko-KR" altLang="en-US" sz="1000" dirty="0" err="1"/>
+              <a:t>발급받은키</a:t>
+            </a:r>
+            <a:r>
+              <a:rPr lang="en-US" altLang="ko-KR" sz="1000" dirty="0"/>
+              <a:t>" -o /dev/null -w "%{</a:t>
+            </a:r>
+            <a:r>
+              <a:rPr lang="en-US" altLang="ko-KR" sz="1000" dirty="0" err="1"/>
+              <a:t>http_code</a:t>
+            </a:r>
+            <a:r>
+              <a:rPr lang="en-US" altLang="ko-KR" sz="1000" dirty="0"/>
+              <a:t>}\n" "http://localhost:5000/</a:t>
+            </a:r>
+            <a:r>
+              <a:rPr lang="en-US" altLang="ko-KR" sz="1000" dirty="0" err="1"/>
+              <a:t>api</a:t>
+            </a:r>
+            <a:r>
+              <a:rPr lang="en-US" altLang="ko-KR" sz="1000" dirty="0"/>
+              <a:t>/partner/v1/dental/</a:t>
+            </a:r>
+            <a:r>
+              <a:rPr lang="en-US" altLang="ko-KR" sz="1000" dirty="0" err="1"/>
+              <a:t>status?wallet</a:t>
+            </a:r>
+            <a:r>
+              <a:rPr lang="en-US" altLang="ko-KR" sz="1000" dirty="0"/>
+              <a:t>=0x</a:t>
+            </a:r>
+            <a:r>
+              <a:rPr lang="ko-KR" altLang="en-US" sz="1000" dirty="0" err="1"/>
+              <a:t>고객지갑</a:t>
+            </a:r>
+            <a:r>
+              <a:rPr lang="en-US" altLang="ko-KR" sz="1000" dirty="0"/>
+              <a:t>"  # → 200</a:t>
+            </a:r>
+            <a:r>
+              <a:rPr lang="ko-KR" altLang="en-US" sz="1000" dirty="0"/>
+              <a:t>결과</a:t>
+            </a:r>
+            <a:r>
+              <a:rPr lang="en-US" altLang="ko-KR" sz="1000" dirty="0"/>
+              <a:t>: 200 </a:t>
+            </a:r>
+            <a:r>
+              <a:rPr lang="ko-KR" altLang="en-US" sz="1000" dirty="0"/>
+              <a:t>응답 본문은 </a:t>
+            </a:r>
+            <a:r>
+              <a:rPr lang="en-US" altLang="ko-KR" sz="1000" dirty="0" err="1"/>
+              <a:t>get_blockchain_dental_status</a:t>
+            </a:r>
+            <a:r>
+              <a:rPr lang="ko-KR" altLang="en-US" sz="1000" dirty="0"/>
+              <a:t>와 동일한 </a:t>
+            </a:r>
+            <a:r>
+              <a:rPr lang="en-US" altLang="ko-KR" sz="1000" dirty="0"/>
+              <a:t>JSON. /admin/partners </a:t>
+            </a:r>
+            <a:r>
+              <a:rPr lang="ko-KR" altLang="en-US" sz="1000" dirty="0"/>
+              <a:t>화면에서 누적 </a:t>
+            </a:r>
+            <a:r>
+              <a:rPr lang="ko-KR" altLang="en-US" sz="1000" dirty="0" err="1"/>
+              <a:t>호출수</a:t>
+            </a:r>
+            <a:r>
+              <a:rPr lang="en-US" altLang="ko-KR" sz="1000" dirty="0"/>
+              <a:t>·</a:t>
+            </a:r>
+            <a:r>
+              <a:rPr lang="ko-KR" altLang="en-US" sz="1000" dirty="0"/>
+              <a:t>예상 청구액</a:t>
+            </a:r>
+            <a:r>
+              <a:rPr lang="en-US" altLang="ko-KR" sz="1000" dirty="0"/>
+              <a:t>(</a:t>
+            </a:r>
+            <a:r>
+              <a:rPr lang="ko-KR" altLang="en-US" sz="1000" dirty="0" err="1"/>
+              <a:t>호출수</a:t>
+            </a:r>
+            <a:r>
+              <a:rPr lang="en-US" altLang="ko-KR" sz="1000" dirty="0"/>
+              <a:t>×10</a:t>
+            </a:r>
+            <a:r>
+              <a:rPr lang="ko-KR" altLang="en-US" sz="1000" dirty="0"/>
+              <a:t>원</a:t>
+            </a:r>
+            <a:r>
+              <a:rPr lang="en-US" altLang="ko-KR" sz="1000" dirty="0"/>
+              <a:t>)</a:t>
+            </a:r>
+            <a:r>
+              <a:rPr lang="ko-KR" altLang="en-US" sz="1000" dirty="0"/>
+              <a:t>이 올라가는 게 보이고</a:t>
+            </a:r>
+            <a:r>
+              <a:rPr lang="en-US" altLang="ko-KR" sz="1000" dirty="0"/>
+              <a:t>, </a:t>
+            </a:r>
+            <a:r>
+              <a:rPr lang="ko-KR" altLang="en-US" sz="1000" dirty="0"/>
+              <a:t>분당 </a:t>
+            </a:r>
+            <a:r>
+              <a:rPr lang="en-US" altLang="ko-KR" sz="1000" dirty="0"/>
+              <a:t>60</a:t>
+            </a:r>
+            <a:r>
+              <a:rPr lang="ko-KR" altLang="en-US" sz="1000" dirty="0"/>
+              <a:t>회 넘기면 </a:t>
+            </a:r>
+            <a:r>
+              <a:rPr lang="en-US" altLang="ko-KR" sz="1000" dirty="0"/>
+              <a:t>429, "</a:t>
+            </a:r>
+            <a:r>
+              <a:rPr lang="ko-KR" altLang="en-US" sz="1000" dirty="0"/>
+              <a:t>해지</a:t>
+            </a:r>
+            <a:r>
+              <a:rPr lang="en-US" altLang="ko-KR" sz="1000" dirty="0"/>
+              <a:t>" </a:t>
+            </a:r>
+            <a:r>
+              <a:rPr lang="ko-KR" altLang="en-US" sz="1000" dirty="0"/>
+              <a:t>누르면 그 다음부터 </a:t>
+            </a:r>
+            <a:r>
+              <a:rPr lang="en-US" altLang="ko-KR" sz="1000" dirty="0"/>
+              <a:t>403.---</a:t>
+            </a:r>
+            <a:r>
+              <a:rPr lang="ko-KR" altLang="en-US" sz="1000" dirty="0"/>
+              <a:t>오라클 청구 </a:t>
+            </a:r>
+            <a:r>
+              <a:rPr lang="ko-KR" altLang="en-US" sz="1000" dirty="0" err="1"/>
+              <a:t>자동승인</a:t>
+            </a:r>
+            <a:r>
+              <a:rPr lang="ko-KR" altLang="en-US" sz="1000" dirty="0"/>
+              <a:t> 기본값 </a:t>
+            </a:r>
+            <a:r>
+              <a:rPr lang="en-US" altLang="ko-KR" sz="1000" dirty="0"/>
+              <a:t>ON</a:t>
+            </a:r>
+            <a:r>
+              <a:rPr lang="ko-KR" altLang="en-US" sz="1000" dirty="0"/>
+              <a:t>테스트</a:t>
+            </a:r>
+            <a:r>
+              <a:rPr lang="en-US" altLang="ko-KR" sz="1000" dirty="0"/>
+              <a:t>: "</a:t>
+            </a:r>
+            <a:r>
+              <a:rPr lang="ko-KR" altLang="en-US" sz="1000" dirty="0"/>
+              <a:t>🦷 보험금 청구</a:t>
+            </a:r>
+            <a:r>
+              <a:rPr lang="en-US" altLang="ko-KR" sz="1000" dirty="0"/>
+              <a:t>" </a:t>
+            </a:r>
+            <a:r>
+              <a:rPr lang="ko-KR" altLang="en-US" sz="1000" dirty="0"/>
+              <a:t>탭에서 </a:t>
+            </a:r>
+            <a:r>
+              <a:rPr lang="ko-KR" altLang="en-US" sz="1000" dirty="0" err="1"/>
+              <a:t>보장한도의</a:t>
+            </a:r>
+            <a:r>
+              <a:rPr lang="ko-KR" altLang="en-US" sz="1000" dirty="0"/>
+              <a:t> </a:t>
+            </a:r>
+            <a:r>
+              <a:rPr lang="en-US" altLang="ko-KR" sz="1000" dirty="0"/>
+              <a:t>20% </a:t>
+            </a:r>
+            <a:r>
+              <a:rPr lang="ko-KR" altLang="en-US" sz="1000" dirty="0"/>
+              <a:t>이하 금액으로 청구 제출</a:t>
+            </a:r>
+            <a:r>
+              <a:rPr lang="en-US" altLang="ko-KR" sz="1000" dirty="0"/>
+              <a:t>.</a:t>
+            </a:r>
+            <a:r>
+              <a:rPr lang="ko-KR" altLang="en-US" sz="1000" dirty="0"/>
+              <a:t>결과</a:t>
+            </a:r>
+            <a:r>
+              <a:rPr lang="en-US" altLang="ko-KR" sz="1000" dirty="0"/>
+              <a:t>: </a:t>
+            </a:r>
+            <a:r>
+              <a:rPr lang="ko-KR" altLang="en-US" sz="1000" dirty="0"/>
+              <a:t>관리자 승인 절차 없이 제출 즉시 </a:t>
+            </a:r>
+            <a:r>
+              <a:rPr lang="en-US" altLang="ko-KR" sz="1000" dirty="0"/>
+              <a:t>"</a:t>
+            </a:r>
+            <a:r>
+              <a:rPr lang="ko-KR" altLang="en-US" sz="1000" dirty="0" err="1"/>
+              <a:t>지급완료</a:t>
+            </a:r>
+            <a:r>
+              <a:rPr lang="en-US" altLang="ko-KR" sz="1000" dirty="0"/>
+              <a:t>" + </a:t>
+            </a:r>
+            <a:r>
+              <a:rPr lang="ko-KR" altLang="en-US" sz="1000" dirty="0"/>
+              <a:t>지갑 잔액  로 청구하면 여전히 </a:t>
+            </a:r>
+            <a:r>
+              <a:rPr lang="en-US" altLang="ko-KR" sz="1000" dirty="0"/>
+              <a:t>"</a:t>
+            </a:r>
+            <a:r>
+              <a:rPr lang="ko-KR" altLang="en-US" sz="1000" dirty="0"/>
+              <a:t>대기중</a:t>
+            </a:r>
+            <a:r>
+              <a:rPr lang="en-US" altLang="ko-KR" sz="1000" dirty="0"/>
+              <a:t>"</a:t>
+            </a:r>
+            <a:r>
+              <a:rPr lang="ko-KR" altLang="en-US" sz="1000" dirty="0"/>
+              <a:t>으로 남고 관리자가 </a:t>
+            </a:r>
+            <a:r>
+              <a:rPr lang="en-US" altLang="ko-KR" sz="1000" dirty="0"/>
+              <a:t>"</a:t>
+            </a:r>
+            <a:r>
+              <a:rPr lang="ko-KR" altLang="en-US" sz="1000" dirty="0"/>
+              <a:t>청구 </a:t>
+            </a:r>
+            <a:r>
+              <a:rPr lang="ko-KR" altLang="en-US" sz="1000" dirty="0" smtClean="0"/>
+              <a:t>심사</a:t>
+            </a:r>
+            <a:r>
+              <a:rPr lang="en-US" altLang="ko-KR" sz="1000" dirty="0" smtClean="0"/>
+              <a:t>“</a:t>
+            </a:r>
+          </a:p>
+          <a:p>
+            <a:endParaRPr lang="en-US" altLang="ko-KR" sz="1000" dirty="0"/>
+          </a:p>
+          <a:p>
+            <a:endParaRPr lang="en-US" altLang="ko-KR" sz="1000" smtClean="0"/>
+          </a:p>
+          <a:p>
+            <a:endParaRPr lang="ko-KR" altLang="en-US" sz="1000" dirty="0"/>
+          </a:p>
+        </p:txBody>
+      </p:sp>
+    </p:spTree>
+    <p:extLst>
+      <p:ext uri="{BB962C8B-B14F-4D97-AF65-F5344CB8AC3E}">
+        <p14:creationId xmlns:p14="http://schemas.microsoft.com/office/powerpoint/2010/main" val="1142590562"/>
+      </p:ext>
+    </p:extLst>
+  </p:cSld>
+  <p:clrMapOvr>
+    <a:masterClrMapping/>
+  </p:clrMapOvr>
+</p:sld>
+</file>
+
 <file path=ppt/theme/theme1.xml><?xml version="1.0" encoding="utf-8"?>
 <a:theme xmlns:a="http://schemas.openxmlformats.org/drawingml/2006/main" name="Office 테마">
   <a:themeElements>
